--- a/public/fun/cards/office/office-23.pptx
+++ b/public/fun/cards/office/office-23.pptx
@@ -3085,7 +3085,7 @@
     <p:bg>
       <p:bgPr>
         <a:solidFill>
-          <a:srgbClr val="314F22"/>
+          <a:srgbClr val="0E1116"/>
         </a:solidFill>
         <a:effectLst/>
       </p:bgPr>
@@ -3099,20 +3099,41 @@
       <p:grpSpPr/>
       <p:sp>
         <p:nvSpPr>
-          <p:cNvPr id="2" name="Rectangle 1"/>
+          <p:cNvPr id="2" name="Freeform 1"/>
           <p:cNvSpPr/>
           <p:nvPr/>
         </p:nvSpPr>
         <p:spPr>
           <a:xfrm>
-            <a:off x="0" y="0"/>
-            <a:ext cx="3240000" cy="720000"/>
+            <a:off x="2016000" y="0"/>
+            <a:ext cx="1224000" cy="1800000"/>
           </a:xfrm>
-          <a:prstGeom prst="rect">
+          <a:custGeom>
             <a:avLst/>
-          </a:prstGeom>
+            <a:gdLst/>
+            <a:ahLst/>
+            <a:cxnLst/>
+            <a:rect l="l" t="t" r="r" b="b"/>
+            <a:pathLst>
+              <a:path w="1224000" h="1800000">
+                <a:moveTo>
+                  <a:pt x="360000" y="0"/>
+                </a:moveTo>
+                <a:lnTo>
+                  <a:pt x="1224000" y="0"/>
+                </a:lnTo>
+                <a:lnTo>
+                  <a:pt x="1224000" y="1800000"/>
+                </a:lnTo>
+                <a:lnTo>
+                  <a:pt x="0" y="1800000"/>
+                </a:lnTo>
+                <a:close/>
+              </a:path>
+            </a:pathLst>
+          </a:custGeom>
           <a:solidFill>
-            <a:srgbClr val="8AB375"/>
+            <a:srgbClr val="FF8FB8"/>
           </a:solidFill>
           <a:ln>
             <a:noFill/>
@@ -3128,20 +3149,41 @@
       </p:sp>
       <p:sp>
         <p:nvSpPr>
-          <p:cNvPr id="3" name="Oval 2"/>
+          <p:cNvPr id="3" name="Freeform 2"/>
           <p:cNvSpPr/>
           <p:nvPr/>
         </p:nvSpPr>
         <p:spPr>
           <a:xfrm>
-            <a:off x="2750688" y="218304"/>
-            <a:ext cx="186624" cy="186624"/>
+            <a:off x="1864800" y="0"/>
+            <a:ext cx="460800" cy="1800000"/>
           </a:xfrm>
-          <a:prstGeom prst="ellipse">
+          <a:custGeom>
             <a:avLst/>
-          </a:prstGeom>
+            <a:gdLst/>
+            <a:ahLst/>
+            <a:cxnLst/>
+            <a:rect l="l" t="t" r="r" b="b"/>
+            <a:pathLst>
+              <a:path w="460800" h="1800000">
+                <a:moveTo>
+                  <a:pt x="360000" y="0"/>
+                </a:moveTo>
+                <a:lnTo>
+                  <a:pt x="460800" y="0"/>
+                </a:lnTo>
+                <a:lnTo>
+                  <a:pt x="100800" y="1800000"/>
+                </a:lnTo>
+                <a:lnTo>
+                  <a:pt x="0" y="1800000"/>
+                </a:lnTo>
+                <a:close/>
+              </a:path>
+            </a:pathLst>
+          </a:custGeom>
           <a:solidFill>
-            <a:srgbClr val="FFFFFF"/>
+            <a:srgbClr val="26292D"/>
           </a:solidFill>
           <a:ln>
             <a:noFill/>
@@ -3157,76 +3199,14 @@
       </p:sp>
       <p:sp>
         <p:nvSpPr>
-          <p:cNvPr id="4" name="Rounded Rectangle 3"/>
-          <p:cNvSpPr/>
+          <p:cNvPr id="4" name="텍스트"/>
+          <p:cNvSpPr txBox="1"/>
           <p:nvPr/>
         </p:nvSpPr>
         <p:spPr>
           <a:xfrm>
-            <a:off x="2799072" y="401472"/>
-            <a:ext cx="89856" cy="55296"/>
-          </a:xfrm>
-          <a:prstGeom prst="roundRect">
-            <a:avLst>
-              <a:gd name="adj" fmla="val 18750"/>
-            </a:avLst>
-          </a:prstGeom>
-          <a:solidFill>
-            <a:srgbClr val="FFFFFF"/>
-          </a:solidFill>
-          <a:ln>
-            <a:noFill/>
-          </a:ln>
-        </p:spPr>
-        <p:txBody>
-          <a:bodyPr rtlCol="0" anchor="ctr"/>
-          <a:lstStyle/>
-          <a:p>
-            <a:pPr algn="ctr"/>
-          </a:p>
-        </p:txBody>
-      </p:sp>
-      <p:sp>
-        <p:nvSpPr>
-          <p:cNvPr id="5" name="Rounded Rectangle 4"/>
-          <p:cNvSpPr/>
-          <p:nvPr/>
-        </p:nvSpPr>
-        <p:spPr>
-          <a:xfrm>
-            <a:off x="2812896" y="467136"/>
-            <a:ext cx="62208" cy="31104"/>
-          </a:xfrm>
-          <a:prstGeom prst="roundRect">
-            <a:avLst>
-              <a:gd name="adj" fmla="val 33333"/>
-            </a:avLst>
-          </a:prstGeom>
-          <a:solidFill>
-            <a:srgbClr val="FFFFFF"/>
-          </a:solidFill>
-          <a:ln>
-            <a:noFill/>
-          </a:ln>
-        </p:spPr>
-        <p:txBody>
-          <a:bodyPr rtlCol="0" anchor="ctr"/>
-          <a:lstStyle/>
-          <a:p>
-            <a:pPr algn="ctr"/>
-          </a:p>
-        </p:txBody>
-      </p:sp>
-      <p:sp>
-        <p:nvSpPr>
-          <p:cNvPr id="6" name="텍스트"/>
-          <p:cNvSpPr txBox="1"/>
-          <p:nvPr/>
-        </p:nvSpPr>
-        <p:spPr>
-          <a:xfrm>
-            <a:off x="230400" y="187200"/>
-            <a:ext cx="2160000" cy="305437"/>
+            <a:off x="252000" y="223200"/>
+            <a:ext cx="1440000" cy="133351"/>
           </a:xfrm>
           <a:prstGeom prst="rect">
             <a:avLst/>
@@ -3241,32 +3221,32 @@
           <a:p>
             <a:pPr algn="l">
               <a:lnSpc>
-                <a:spcPts val="2682"/>
+                <a:spcPts val="1015"/>
               </a:lnSpc>
             </a:pPr>
             <a:r>
-              <a:rPr sz="1850" b="1" spc="50">
+              <a:rPr sz="700" b="1" spc="200">
                 <a:solidFill>
-                  <a:srgbClr val="FFFFFF"/>
+                  <a:srgbClr val="A3A9B5"/>
                 </a:solidFill>
-                <a:latin typeface="바탕"/>
-                <a:ea typeface="바탕"/>
+                <a:latin typeface="맑은 고딕"/>
+                <a:ea typeface="맑은 고딕"/>
               </a:rPr>
-              <a:t>류하은</a:t>
-            </a:r>
-          </a:p>
-        </p:txBody>
-      </p:sp>
-      <p:sp>
-        <p:nvSpPr>
-          <p:cNvPr id="7" name="텍스트"/>
+              <a:t>회사명 · 부서명</a:t>
+            </a:r>
+          </a:p>
+        </p:txBody>
+      </p:sp>
+      <p:sp>
+        <p:nvSpPr>
+          <p:cNvPr id="5" name="텍스트"/>
           <p:cNvSpPr txBox="1"/>
           <p:nvPr/>
         </p:nvSpPr>
         <p:spPr>
           <a:xfrm>
-            <a:off x="230400" y="475200"/>
-            <a:ext cx="2160000" cy="122400"/>
+            <a:off x="252000" y="540000"/>
+            <a:ext cx="1584000" cy="360000"/>
           </a:xfrm>
           <a:prstGeom prst="rect">
             <a:avLst/>
@@ -3281,32 +3261,32 @@
           <a:p>
             <a:pPr algn="l">
               <a:lnSpc>
-                <a:spcPts val="1232"/>
+                <a:spcPts val="3190"/>
               </a:lnSpc>
             </a:pPr>
             <a:r>
-              <a:rPr sz="850" b="1">
+              <a:rPr sz="2200" b="1">
                 <a:solidFill>
                   <a:srgbClr val="FFFFFF"/>
                 </a:solidFill>
                 <a:latin typeface="맑은 고딕"/>
                 <a:ea typeface="맑은 고딕"/>
               </a:rPr>
-              <a:t>개발팀 선임</a:t>
-            </a:r>
-          </a:p>
-        </p:txBody>
-      </p:sp>
-      <p:sp>
-        <p:nvSpPr>
-          <p:cNvPr id="8" name="텍스트"/>
+              <a:t>류하은</a:t>
+            </a:r>
+          </a:p>
+        </p:txBody>
+      </p:sp>
+      <p:sp>
+        <p:nvSpPr>
+          <p:cNvPr id="6" name="텍스트"/>
           <p:cNvSpPr txBox="1"/>
           <p:nvPr/>
         </p:nvSpPr>
         <p:spPr>
           <a:xfrm>
-            <a:off x="230400" y="835200"/>
-            <a:ext cx="1800000" cy="100800"/>
+            <a:off x="252000" y="943200"/>
+            <a:ext cx="1584000" cy="171451"/>
           </a:xfrm>
           <a:prstGeom prst="rect">
             <a:avLst/>
@@ -3321,32 +3301,61 @@
           <a:p>
             <a:pPr algn="l">
               <a:lnSpc>
-                <a:spcPts val="1087"/>
+                <a:spcPts val="1305"/>
               </a:lnSpc>
             </a:pPr>
             <a:r>
-              <a:rPr sz="750" b="1" spc="150">
+              <a:rPr sz="900" b="0">
                 <a:solidFill>
-                  <a:srgbClr val="B7C1B2"/>
+                  <a:srgbClr val="A3A9B5"/>
                 </a:solidFill>
                 <a:latin typeface="맑은 고딕"/>
                 <a:ea typeface="맑은 고딕"/>
               </a:rPr>
-              <a:t>회사명 · 부서명</a:t>
-            </a:r>
-          </a:p>
-        </p:txBody>
-      </p:sp>
-      <p:sp>
-        <p:nvSpPr>
-          <p:cNvPr id="9" name="텍스트"/>
+              <a:t>개발팀 선임</a:t>
+            </a:r>
+          </a:p>
+        </p:txBody>
+      </p:sp>
+      <p:sp>
+        <p:nvSpPr>
+          <p:cNvPr id="7" name="Rectangle 6"/>
+          <p:cNvSpPr/>
+          <p:nvPr/>
+        </p:nvSpPr>
+        <p:spPr>
+          <a:xfrm>
+            <a:off x="252000" y="1195200"/>
+            <a:ext cx="144000" cy="18000"/>
+          </a:xfrm>
+          <a:prstGeom prst="rect">
+            <a:avLst/>
+          </a:prstGeom>
+          <a:solidFill>
+            <a:srgbClr val="FF8FB8"/>
+          </a:solidFill>
+          <a:ln>
+            <a:noFill/>
+          </a:ln>
+        </p:spPr>
+        <p:txBody>
+          <a:bodyPr rtlCol="0" anchor="ctr"/>
+          <a:lstStyle/>
+          <a:p>
+            <a:pPr algn="ctr"/>
+          </a:p>
+        </p:txBody>
+      </p:sp>
+      <p:sp>
+        <p:nvSpPr>
+          <p:cNvPr id="8" name="텍스트"/>
           <p:cNvSpPr txBox="1"/>
           <p:nvPr/>
         </p:nvSpPr>
         <p:spPr>
           <a:xfrm>
-            <a:off x="230400" y="1015200"/>
-            <a:ext cx="122400" cy="168911"/>
+            <a:off x="252000" y="1328400"/>
+            <a:ext cx="331200" cy="99061"/>
           </a:xfrm>
           <a:prstGeom prst="rect">
             <a:avLst/>
@@ -3361,32 +3370,32 @@
           <a:p>
             <a:pPr algn="l">
               <a:lnSpc>
-                <a:spcPts val="1015"/>
+                <a:spcPts val="754"/>
               </a:lnSpc>
             </a:pPr>
             <a:r>
-              <a:rPr sz="700" b="1">
+              <a:rPr sz="520" b="1" spc="120">
                 <a:solidFill>
-                  <a:srgbClr val="A1C291"/>
+                  <a:srgbClr val="A3A9B5"/>
                 </a:solidFill>
                 <a:latin typeface="맑은 고딕"/>
                 <a:ea typeface="맑은 고딕"/>
               </a:rPr>
-              <a:t>T</a:t>
-            </a:r>
-          </a:p>
-        </p:txBody>
-      </p:sp>
-      <p:sp>
-        <p:nvSpPr>
-          <p:cNvPr id="10" name="텍스트"/>
+              <a:t>TEL</a:t>
+            </a:r>
+          </a:p>
+        </p:txBody>
+      </p:sp>
+      <p:sp>
+        <p:nvSpPr>
+          <p:cNvPr id="9" name="텍스트"/>
           <p:cNvSpPr txBox="1"/>
           <p:nvPr/>
         </p:nvSpPr>
         <p:spPr>
           <a:xfrm>
-            <a:off x="374400" y="1015200"/>
-            <a:ext cx="1872000" cy="168911"/>
+            <a:off x="583200" y="1317600"/>
+            <a:ext cx="1188000" cy="125731"/>
           </a:xfrm>
           <a:prstGeom prst="rect">
             <a:avLst/>
@@ -3401,11 +3410,11 @@
           <a:p>
             <a:pPr algn="l">
               <a:lnSpc>
-                <a:spcPts val="1015"/>
+                <a:spcPts val="956"/>
               </a:lnSpc>
             </a:pPr>
             <a:r>
-              <a:rPr sz="700" b="0">
+              <a:rPr sz="660" b="0">
                 <a:solidFill>
                   <a:srgbClr val="FFFFFF"/>
                 </a:solidFill>
@@ -3419,14 +3428,14 @@
       </p:sp>
       <p:sp>
         <p:nvSpPr>
-          <p:cNvPr id="11" name="텍스트"/>
+          <p:cNvPr id="10" name="텍스트"/>
           <p:cNvSpPr txBox="1"/>
           <p:nvPr/>
         </p:nvSpPr>
         <p:spPr>
           <a:xfrm>
-            <a:off x="230400" y="1184111"/>
-            <a:ext cx="122400" cy="168911"/>
+            <a:off x="252000" y="1458000"/>
+            <a:ext cx="331200" cy="99061"/>
           </a:xfrm>
           <a:prstGeom prst="rect">
             <a:avLst/>
@@ -3441,32 +3450,32 @@
           <a:p>
             <a:pPr algn="l">
               <a:lnSpc>
-                <a:spcPts val="1015"/>
+                <a:spcPts val="754"/>
               </a:lnSpc>
             </a:pPr>
             <a:r>
-              <a:rPr sz="700" b="1">
+              <a:rPr sz="520" b="1" spc="120">
                 <a:solidFill>
-                  <a:srgbClr val="A1C291"/>
+                  <a:srgbClr val="A3A9B5"/>
                 </a:solidFill>
                 <a:latin typeface="맑은 고딕"/>
                 <a:ea typeface="맑은 고딕"/>
               </a:rPr>
-              <a:t>E</a:t>
-            </a:r>
-          </a:p>
-        </p:txBody>
-      </p:sp>
-      <p:sp>
-        <p:nvSpPr>
-          <p:cNvPr id="12" name="텍스트"/>
+              <a:t>MAIL</a:t>
+            </a:r>
+          </a:p>
+        </p:txBody>
+      </p:sp>
+      <p:sp>
+        <p:nvSpPr>
+          <p:cNvPr id="11" name="텍스트"/>
           <p:cNvSpPr txBox="1"/>
           <p:nvPr/>
         </p:nvSpPr>
         <p:spPr>
           <a:xfrm>
-            <a:off x="374400" y="1184111"/>
-            <a:ext cx="1872000" cy="168911"/>
+            <a:off x="583200" y="1447200"/>
+            <a:ext cx="1188000" cy="125731"/>
           </a:xfrm>
           <a:prstGeom prst="rect">
             <a:avLst/>
@@ -3481,11 +3490,11 @@
           <a:p>
             <a:pPr algn="l">
               <a:lnSpc>
-                <a:spcPts val="1015"/>
+                <a:spcPts val="956"/>
               </a:lnSpc>
             </a:pPr>
             <a:r>
-              <a:rPr sz="700" b="0">
+              <a:rPr sz="660" b="0">
                 <a:solidFill>
                   <a:srgbClr val="FFFFFF"/>
                 </a:solidFill>
@@ -3499,14 +3508,14 @@
       </p:sp>
       <p:sp>
         <p:nvSpPr>
-          <p:cNvPr id="13" name="텍스트"/>
+          <p:cNvPr id="12" name="텍스트"/>
           <p:cNvSpPr txBox="1"/>
           <p:nvPr/>
         </p:nvSpPr>
         <p:spPr>
           <a:xfrm>
-            <a:off x="230400" y="1353022"/>
-            <a:ext cx="122400" cy="168911"/>
+            <a:off x="252000" y="1587600"/>
+            <a:ext cx="331200" cy="99061"/>
           </a:xfrm>
           <a:prstGeom prst="rect">
             <a:avLst/>
@@ -3521,32 +3530,32 @@
           <a:p>
             <a:pPr algn="l">
               <a:lnSpc>
-                <a:spcPts val="1015"/>
+                <a:spcPts val="754"/>
               </a:lnSpc>
             </a:pPr>
             <a:r>
-              <a:rPr sz="700" b="1">
+              <a:rPr sz="520" b="1" spc="120">
                 <a:solidFill>
-                  <a:srgbClr val="A1C291"/>
+                  <a:srgbClr val="A3A9B5"/>
                 </a:solidFill>
                 <a:latin typeface="맑은 고딕"/>
                 <a:ea typeface="맑은 고딕"/>
               </a:rPr>
-              <a:t>A</a:t>
-            </a:r>
-          </a:p>
-        </p:txBody>
-      </p:sp>
-      <p:sp>
-        <p:nvSpPr>
-          <p:cNvPr id="14" name="텍스트"/>
+              <a:t>ADDR</a:t>
+            </a:r>
+          </a:p>
+        </p:txBody>
+      </p:sp>
+      <p:sp>
+        <p:nvSpPr>
+          <p:cNvPr id="13" name="텍스트"/>
           <p:cNvSpPr txBox="1"/>
           <p:nvPr/>
         </p:nvSpPr>
         <p:spPr>
           <a:xfrm>
-            <a:off x="374400" y="1353022"/>
-            <a:ext cx="1872000" cy="168911"/>
+            <a:off x="583200" y="1576800"/>
+            <a:ext cx="1188000" cy="125731"/>
           </a:xfrm>
           <a:prstGeom prst="rect">
             <a:avLst/>
@@ -3561,11 +3570,11 @@
           <a:p>
             <a:pPr algn="l">
               <a:lnSpc>
-                <a:spcPts val="1015"/>
+                <a:spcPts val="956"/>
               </a:lnSpc>
             </a:pPr>
             <a:r>
-              <a:rPr sz="700" b="0">
+              <a:rPr sz="660" b="0">
                 <a:solidFill>
                   <a:srgbClr val="FFFFFF"/>
                 </a:solidFill>
@@ -3591,7 +3600,7 @@
     <p:bg>
       <p:bgPr>
         <a:solidFill>
-          <a:srgbClr val="F3F9F1"/>
+          <a:srgbClr val="FFFFFF"/>
         </a:solidFill>
         <a:effectLst/>
       </p:bgPr>
@@ -3605,77 +3614,20 @@
       <p:grpSpPr/>
       <p:sp>
         <p:nvSpPr>
-          <p:cNvPr id="2" name="Freeform 1"/>
+          <p:cNvPr id="2" name="Rectangle 1"/>
           <p:cNvSpPr/>
           <p:nvPr/>
         </p:nvSpPr>
         <p:spPr>
           <a:xfrm>
-            <a:off x="2016000" y="576000"/>
-            <a:ext cx="1224000" cy="1224000"/>
+            <a:off x="252000" y="540000"/>
+            <a:ext cx="28800" cy="720000"/>
           </a:xfrm>
-          <a:custGeom>
+          <a:prstGeom prst="rect">
             <a:avLst/>
-            <a:gdLst/>
-            <a:ahLst/>
-            <a:cxnLst/>
-            <a:rect l="l" t="t" r="r" b="b"/>
-            <a:pathLst>
-              <a:path w="1224000" h="1224000">
-                <a:moveTo>
-                  <a:pt x="1224000" y="1224000"/>
-                </a:moveTo>
-                <a:lnTo>
-                  <a:pt x="0" y="1224000"/>
-                </a:lnTo>
-                <a:lnTo>
-                  <a:pt x="7696" y="1086955"/>
-                </a:lnTo>
-                <a:lnTo>
-                  <a:pt x="30688" y="951634"/>
-                </a:lnTo>
-                <a:lnTo>
-                  <a:pt x="68687" y="819738"/>
-                </a:lnTo>
-                <a:lnTo>
-                  <a:pt x="121214" y="692926"/>
-                </a:lnTo>
-                <a:lnTo>
-                  <a:pt x="187610" y="572793"/>
-                </a:lnTo>
-                <a:lnTo>
-                  <a:pt x="267038" y="460848"/>
-                </a:lnTo>
-                <a:lnTo>
-                  <a:pt x="358501" y="358501"/>
-                </a:lnTo>
-                <a:lnTo>
-                  <a:pt x="460848" y="267038"/>
-                </a:lnTo>
-                <a:lnTo>
-                  <a:pt x="572793" y="187610"/>
-                </a:lnTo>
-                <a:lnTo>
-                  <a:pt x="692926" y="121214"/>
-                </a:lnTo>
-                <a:lnTo>
-                  <a:pt x="819738" y="68687"/>
-                </a:lnTo>
-                <a:lnTo>
-                  <a:pt x="951634" y="30688"/>
-                </a:lnTo>
-                <a:lnTo>
-                  <a:pt x="1086955" y="7696"/>
-                </a:lnTo>
-                <a:lnTo>
-                  <a:pt x="1224000" y="0"/>
-                </a:lnTo>
-                <a:close/>
-              </a:path>
-            </a:pathLst>
-          </a:custGeom>
+          </a:prstGeom>
           <a:solidFill>
-            <a:srgbClr val="5D9640"/>
+            <a:srgbClr val="FF8FB8"/>
           </a:solidFill>
           <a:ln>
             <a:noFill/>
@@ -3691,191 +3643,14 @@
       </p:sp>
       <p:sp>
         <p:nvSpPr>
-          <p:cNvPr id="3" name="Freeform 2"/>
-          <p:cNvSpPr/>
+          <p:cNvPr id="3" name="텍스트"/>
+          <p:cNvSpPr txBox="1"/>
           <p:nvPr/>
         </p:nvSpPr>
         <p:spPr>
           <a:xfrm>
-            <a:off x="2520000" y="1080000"/>
-            <a:ext cx="720000" cy="720000"/>
-          </a:xfrm>
-          <a:custGeom>
-            <a:avLst/>
-            <a:gdLst/>
-            <a:ahLst/>
-            <a:cxnLst/>
-            <a:rect l="l" t="t" r="r" b="b"/>
-            <a:pathLst>
-              <a:path w="720000" h="720000">
-                <a:moveTo>
-                  <a:pt x="720000" y="720000"/>
-                </a:moveTo>
-                <a:lnTo>
-                  <a:pt x="0" y="720000"/>
-                </a:lnTo>
-                <a:lnTo>
-                  <a:pt x="4527" y="639386"/>
-                </a:lnTo>
-                <a:lnTo>
-                  <a:pt x="18052" y="559785"/>
-                </a:lnTo>
-                <a:lnTo>
-                  <a:pt x="40404" y="482199"/>
-                </a:lnTo>
-                <a:lnTo>
-                  <a:pt x="71302" y="407604"/>
-                </a:lnTo>
-                <a:lnTo>
-                  <a:pt x="110359" y="336937"/>
-                </a:lnTo>
-                <a:lnTo>
-                  <a:pt x="157081" y="271087"/>
-                </a:lnTo>
-                <a:lnTo>
-                  <a:pt x="210883" y="210883"/>
-                </a:lnTo>
-                <a:lnTo>
-                  <a:pt x="271087" y="157081"/>
-                </a:lnTo>
-                <a:lnTo>
-                  <a:pt x="336937" y="110359"/>
-                </a:lnTo>
-                <a:lnTo>
-                  <a:pt x="407604" y="71302"/>
-                </a:lnTo>
-                <a:lnTo>
-                  <a:pt x="482199" y="40404"/>
-                </a:lnTo>
-                <a:lnTo>
-                  <a:pt x="559785" y="18052"/>
-                </a:lnTo>
-                <a:lnTo>
-                  <a:pt x="639386" y="4527"/>
-                </a:lnTo>
-                <a:lnTo>
-                  <a:pt x="720000" y="0"/>
-                </a:lnTo>
-                <a:close/>
-              </a:path>
-            </a:pathLst>
-          </a:custGeom>
-          <a:solidFill>
-            <a:srgbClr val="E6F3E0"/>
-          </a:solidFill>
-          <a:ln>
-            <a:noFill/>
-          </a:ln>
-        </p:spPr>
-        <p:txBody>
-          <a:bodyPr rtlCol="0" anchor="ctr"/>
-          <a:lstStyle/>
-          <a:p>
-            <a:pPr algn="ctr"/>
-          </a:p>
-        </p:txBody>
-      </p:sp>
-      <p:sp>
-        <p:nvSpPr>
-          <p:cNvPr id="4" name="Oval 3"/>
-          <p:cNvSpPr/>
-          <p:nvPr/>
-        </p:nvSpPr>
-        <p:spPr>
-          <a:xfrm>
-            <a:off x="2811960" y="1372680"/>
-            <a:ext cx="136080" cy="136080"/>
-          </a:xfrm>
-          <a:prstGeom prst="ellipse">
-            <a:avLst/>
-          </a:prstGeom>
-          <a:solidFill>
-            <a:srgbClr val="FFFFFF"/>
-          </a:solidFill>
-          <a:ln>
-            <a:noFill/>
-          </a:ln>
-        </p:spPr>
-        <p:txBody>
-          <a:bodyPr rtlCol="0" anchor="ctr"/>
-          <a:lstStyle/>
-          <a:p>
-            <a:pPr algn="ctr"/>
-          </a:p>
-        </p:txBody>
-      </p:sp>
-      <p:sp>
-        <p:nvSpPr>
-          <p:cNvPr id="5" name="Rounded Rectangle 4"/>
-          <p:cNvSpPr/>
-          <p:nvPr/>
-        </p:nvSpPr>
-        <p:spPr>
-          <a:xfrm>
-            <a:off x="2847240" y="1506240"/>
-            <a:ext cx="65520" cy="40320"/>
-          </a:xfrm>
-          <a:prstGeom prst="roundRect">
-            <a:avLst>
-              <a:gd name="adj" fmla="val 18749"/>
-            </a:avLst>
-          </a:prstGeom>
-          <a:solidFill>
-            <a:srgbClr val="808080"/>
-          </a:solidFill>
-          <a:ln>
-            <a:noFill/>
-          </a:ln>
-        </p:spPr>
-        <p:txBody>
-          <a:bodyPr rtlCol="0" anchor="ctr"/>
-          <a:lstStyle/>
-          <a:p>
-            <a:pPr algn="ctr"/>
-          </a:p>
-        </p:txBody>
-      </p:sp>
-      <p:sp>
-        <p:nvSpPr>
-          <p:cNvPr id="6" name="Rounded Rectangle 5"/>
-          <p:cNvSpPr/>
-          <p:nvPr/>
-        </p:nvSpPr>
-        <p:spPr>
-          <a:xfrm>
-            <a:off x="2857320" y="1554120"/>
-            <a:ext cx="45360" cy="22680"/>
-          </a:xfrm>
-          <a:prstGeom prst="roundRect">
-            <a:avLst>
-              <a:gd name="adj" fmla="val 33333"/>
-            </a:avLst>
-          </a:prstGeom>
-          <a:solidFill>
-            <a:srgbClr val="808080"/>
-          </a:solidFill>
-          <a:ln>
-            <a:noFill/>
-          </a:ln>
-        </p:spPr>
-        <p:txBody>
-          <a:bodyPr rtlCol="0" anchor="ctr"/>
-          <a:lstStyle/>
-          <a:p>
-            <a:pPr algn="ctr"/>
-          </a:p>
-        </p:txBody>
-      </p:sp>
-      <p:sp>
-        <p:nvSpPr>
-          <p:cNvPr id="7" name="텍스트"/>
-          <p:cNvSpPr txBox="1"/>
-          <p:nvPr/>
-        </p:nvSpPr>
-        <p:spPr>
-          <a:xfrm>
-            <a:off x="252000" y="324000"/>
-            <a:ext cx="1944000" cy="720000"/>
+            <a:off x="424800" y="612000"/>
+            <a:ext cx="2160000" cy="648000"/>
           </a:xfrm>
           <a:prstGeom prst="rect">
             <a:avLst/>
@@ -3890,16 +3665,16 @@
           <a:p>
             <a:pPr algn="l">
               <a:lnSpc>
-                <a:spcPts val="1739"/>
+                <a:spcPts val="1812"/>
               </a:lnSpc>
             </a:pPr>
             <a:r>
-              <a:rPr sz="1200" b="1">
+              <a:rPr sz="1250" b="1">
                 <a:solidFill>
-                  <a:srgbClr val="314F22"/>
+                  <a:srgbClr val="12151C"/>
                 </a:solidFill>
-                <a:latin typeface="바탕"/>
-                <a:ea typeface="바탕"/>
+                <a:latin typeface="맑은 고딕"/>
+                <a:ea typeface="맑은 고딕"/>
               </a:rPr>
               <a:t>협업의 온도를 높이는 사람</a:t>
             </a:r>
@@ -3908,14 +3683,14 @@
       </p:sp>
       <p:sp>
         <p:nvSpPr>
-          <p:cNvPr id="8" name="텍스트"/>
+          <p:cNvPr id="4" name="텍스트"/>
           <p:cNvSpPr txBox="1"/>
           <p:nvPr/>
         </p:nvSpPr>
         <p:spPr>
           <a:xfrm>
-            <a:off x="252000" y="1476000"/>
-            <a:ext cx="1440000" cy="108000"/>
+            <a:off x="424800" y="1512000"/>
+            <a:ext cx="1800000" cy="123826"/>
           </a:xfrm>
           <a:prstGeom prst="rect">
             <a:avLst/>
@@ -3930,13 +3705,13 @@
           <a:p>
             <a:pPr algn="l">
               <a:lnSpc>
-                <a:spcPts val="1087"/>
+                <a:spcPts val="942"/>
               </a:lnSpc>
             </a:pPr>
             <a:r>
-              <a:rPr sz="750" b="1" spc="200">
+              <a:rPr sz="650" b="1" spc="200">
                 <a:solidFill>
-                  <a:srgbClr val="63755A"/>
+                  <a:srgbClr val="6B7280"/>
                 </a:solidFill>
                 <a:latin typeface="맑은 고딕"/>
                 <a:ea typeface="맑은 고딕"/>

--- a/public/fun/cards/office/office-23.pptx
+++ b/public/fun/cards/office/office-23.pptx
@@ -3105,8 +3105,8 @@
         </p:nvSpPr>
         <p:spPr>
           <a:xfrm>
-            <a:off x="2016000" y="0"/>
-            <a:ext cx="1224000" cy="1800000"/>
+            <a:off x="2124000" y="0"/>
+            <a:ext cx="1116000" cy="1800000"/>
           </a:xfrm>
           <a:custGeom>
             <a:avLst/>
@@ -3115,15 +3115,15 @@
             <a:cxnLst/>
             <a:rect l="l" t="t" r="r" b="b"/>
             <a:pathLst>
-              <a:path w="1224000" h="1800000">
+              <a:path w="1116000" h="1800000">
                 <a:moveTo>
                   <a:pt x="360000" y="0"/>
                 </a:moveTo>
                 <a:lnTo>
-                  <a:pt x="1224000" y="0"/>
+                  <a:pt x="1116000" y="0"/>
                 </a:lnTo>
                 <a:lnTo>
-                  <a:pt x="1224000" y="1800000"/>
+                  <a:pt x="1116000" y="1800000"/>
                 </a:lnTo>
                 <a:lnTo>
                   <a:pt x="0" y="1800000"/>
@@ -3147,66 +3147,79 @@
           </a:p>
         </p:txBody>
       </p:sp>
-      <p:sp>
-        <p:nvSpPr>
-          <p:cNvPr id="3" name="Freeform 2"/>
-          <p:cNvSpPr/>
+      <p:cxnSp>
+        <p:nvCxnSpPr>
+          <p:cNvPr id="3" name="Connector 2"/>
+          <p:cNvCxnSpPr/>
           <p:nvPr/>
-        </p:nvSpPr>
-        <p:spPr>
-          <a:xfrm>
-            <a:off x="1864800" y="0"/>
-            <a:ext cx="460800" cy="1800000"/>
-          </a:xfrm>
-          <a:custGeom>
+        </p:nvCxnSpPr>
+        <p:spPr>
+          <a:xfrm flipH="1">
+            <a:off x="2044800" y="0"/>
+            <a:ext cx="360000" cy="1800000"/>
+          </a:xfrm>
+          <a:prstGeom prst="line">
             <a:avLst/>
-            <a:gdLst/>
-            <a:ahLst/>
-            <a:cxnLst/>
-            <a:rect l="l" t="t" r="r" b="b"/>
-            <a:pathLst>
-              <a:path w="460800" h="1800000">
-                <a:moveTo>
-                  <a:pt x="360000" y="0"/>
-                </a:moveTo>
-                <a:lnTo>
-                  <a:pt x="460800" y="0"/>
-                </a:lnTo>
-                <a:lnTo>
-                  <a:pt x="100800" y="1800000"/>
-                </a:lnTo>
-                <a:lnTo>
-                  <a:pt x="0" y="1800000"/>
-                </a:lnTo>
-                <a:close/>
-              </a:path>
-            </a:pathLst>
-          </a:custGeom>
-          <a:solidFill>
-            <a:srgbClr val="26292D"/>
-          </a:solidFill>
-          <a:ln>
-            <a:noFill/>
+          </a:prstGeom>
+          <a:ln w="3600">
+            <a:solidFill>
+              <a:srgbClr val="26292D"/>
+            </a:solidFill>
           </a:ln>
         </p:spPr>
-        <p:txBody>
-          <a:bodyPr rtlCol="0" anchor="ctr"/>
-          <a:lstStyle/>
-          <a:p>
-            <a:pPr algn="ctr"/>
-          </a:p>
-        </p:txBody>
-      </p:sp>
-      <p:sp>
-        <p:nvSpPr>
-          <p:cNvPr id="4" name="텍스트"/>
+      </p:cxnSp>
+      <p:cxnSp>
+        <p:nvCxnSpPr>
+          <p:cNvPr id="4" name="Connector 3"/>
+          <p:cNvCxnSpPr/>
+          <p:nvPr/>
+        </p:nvCxnSpPr>
+        <p:spPr>
+          <a:xfrm flipH="1">
+            <a:off x="1965600" y="0"/>
+            <a:ext cx="360000" cy="1800000"/>
+          </a:xfrm>
+          <a:prstGeom prst="line">
+            <a:avLst/>
+          </a:prstGeom>
+          <a:ln w="3600">
+            <a:solidFill>
+              <a:srgbClr val="26292D"/>
+            </a:solidFill>
+          </a:ln>
+        </p:spPr>
+      </p:cxnSp>
+      <p:cxnSp>
+        <p:nvCxnSpPr>
+          <p:cNvPr id="5" name="Connector 4"/>
+          <p:cNvCxnSpPr/>
+          <p:nvPr/>
+        </p:nvCxnSpPr>
+        <p:spPr>
+          <a:xfrm flipH="1">
+            <a:off x="1886400" y="0"/>
+            <a:ext cx="360000" cy="1800000"/>
+          </a:xfrm>
+          <a:prstGeom prst="line">
+            <a:avLst/>
+          </a:prstGeom>
+          <a:ln w="3600">
+            <a:solidFill>
+              <a:srgbClr val="26292D"/>
+            </a:solidFill>
+          </a:ln>
+        </p:spPr>
+      </p:cxnSp>
+      <p:sp>
+        <p:nvSpPr>
+          <p:cNvPr id="6" name="텍스트"/>
           <p:cNvSpPr txBox="1"/>
           <p:nvPr/>
         </p:nvSpPr>
         <p:spPr>
           <a:xfrm>
-            <a:off x="252000" y="223200"/>
-            <a:ext cx="1440000" cy="133351"/>
+            <a:off x="252000" y="252000"/>
+            <a:ext cx="1440000" cy="123826"/>
           </a:xfrm>
           <a:prstGeom prst="rect">
             <a:avLst/>
@@ -3221,11 +3234,11 @@
           <a:p>
             <a:pPr algn="l">
               <a:lnSpc>
-                <a:spcPts val="1015"/>
+                <a:spcPts val="942"/>
               </a:lnSpc>
             </a:pPr>
             <a:r>
-              <a:rPr sz="700" b="1" spc="200">
+              <a:rPr sz="650" b="1" spc="220">
                 <a:solidFill>
                   <a:srgbClr val="A3A9B5"/>
                 </a:solidFill>
@@ -3237,16 +3250,37 @@
           </a:p>
         </p:txBody>
       </p:sp>
-      <p:sp>
-        <p:nvSpPr>
-          <p:cNvPr id="5" name="텍스트"/>
+      <p:cxnSp>
+        <p:nvCxnSpPr>
+          <p:cNvPr id="7" name="Connector 6"/>
+          <p:cNvCxnSpPr/>
+          <p:nvPr/>
+        </p:nvCxnSpPr>
+        <p:spPr>
+          <a:xfrm>
+            <a:off x="252000" y="374400"/>
+            <a:ext cx="1260000" cy="0"/>
+          </a:xfrm>
+          <a:prstGeom prst="line">
+            <a:avLst/>
+          </a:prstGeom>
+          <a:ln w="3600">
+            <a:solidFill>
+              <a:srgbClr val="2A2F38"/>
+            </a:solidFill>
+          </a:ln>
+        </p:spPr>
+      </p:cxnSp>
+      <p:sp>
+        <p:nvSpPr>
+          <p:cNvPr id="8" name="텍스트"/>
           <p:cNvSpPr txBox="1"/>
           <p:nvPr/>
         </p:nvSpPr>
         <p:spPr>
           <a:xfrm>
-            <a:off x="252000" y="540000"/>
-            <a:ext cx="1584000" cy="360000"/>
+            <a:off x="252000" y="633600"/>
+            <a:ext cx="1800000" cy="237600"/>
           </a:xfrm>
           <a:prstGeom prst="rect">
             <a:avLst/>
@@ -3261,11 +3295,11 @@
           <a:p>
             <a:pPr algn="l">
               <a:lnSpc>
-                <a:spcPts val="3190"/>
+                <a:spcPts val="1957"/>
               </a:lnSpc>
             </a:pPr>
             <a:r>
-              <a:rPr sz="2200" b="1">
+              <a:rPr sz="1350" b="1" spc="120">
                 <a:solidFill>
                   <a:srgbClr val="FFFFFF"/>
                 </a:solidFill>
@@ -3279,14 +3313,14 @@
       </p:sp>
       <p:sp>
         <p:nvSpPr>
-          <p:cNvPr id="6" name="텍스트"/>
+          <p:cNvPr id="9" name="텍스트"/>
           <p:cNvSpPr txBox="1"/>
           <p:nvPr/>
         </p:nvSpPr>
         <p:spPr>
           <a:xfrm>
-            <a:off x="252000" y="943200"/>
-            <a:ext cx="1584000" cy="171451"/>
+            <a:off x="252000" y="885600"/>
+            <a:ext cx="1800000" cy="133351"/>
           </a:xfrm>
           <a:prstGeom prst="rect">
             <a:avLst/>
@@ -3301,11 +3335,11 @@
           <a:p>
             <a:pPr algn="l">
               <a:lnSpc>
-                <a:spcPts val="1305"/>
+                <a:spcPts val="1015"/>
               </a:lnSpc>
             </a:pPr>
             <a:r>
-              <a:rPr sz="900" b="0">
+              <a:rPr sz="700" b="0" spc="60">
                 <a:solidFill>
                   <a:srgbClr val="A3A9B5"/>
                 </a:solidFill>
@@ -3319,14 +3353,14 @@
       </p:sp>
       <p:sp>
         <p:nvSpPr>
-          <p:cNvPr id="7" name="Rectangle 6"/>
+          <p:cNvPr id="10" name="Rectangle 9"/>
           <p:cNvSpPr/>
           <p:nvPr/>
         </p:nvSpPr>
         <p:spPr>
           <a:xfrm>
-            <a:off x="252000" y="1195200"/>
-            <a:ext cx="144000" cy="18000"/>
+            <a:off x="252000" y="1044000"/>
+            <a:ext cx="129600" cy="14400"/>
           </a:xfrm>
           <a:prstGeom prst="rect">
             <a:avLst/>
@@ -3348,14 +3382,14 @@
       </p:sp>
       <p:sp>
         <p:nvSpPr>
-          <p:cNvPr id="8" name="텍스트"/>
+          <p:cNvPr id="11" name="텍스트"/>
           <p:cNvSpPr txBox="1"/>
           <p:nvPr/>
         </p:nvSpPr>
         <p:spPr>
           <a:xfrm>
-            <a:off x="252000" y="1328400"/>
-            <a:ext cx="331200" cy="99061"/>
+            <a:off x="252000" y="1184400"/>
+            <a:ext cx="324000" cy="91441"/>
           </a:xfrm>
           <a:prstGeom prst="rect">
             <a:avLst/>
@@ -3370,11 +3404,11 @@
           <a:p>
             <a:pPr algn="l">
               <a:lnSpc>
-                <a:spcPts val="754"/>
+                <a:spcPts val="696"/>
               </a:lnSpc>
             </a:pPr>
             <a:r>
-              <a:rPr sz="520" b="1" spc="120">
+              <a:rPr sz="480" b="1" spc="140">
                 <a:solidFill>
                   <a:srgbClr val="A3A9B5"/>
                 </a:solidFill>
@@ -3388,14 +3422,14 @@
       </p:sp>
       <p:sp>
         <p:nvSpPr>
-          <p:cNvPr id="9" name="텍스트"/>
+          <p:cNvPr id="12" name="텍스트"/>
           <p:cNvSpPr txBox="1"/>
           <p:nvPr/>
         </p:nvSpPr>
         <p:spPr>
           <a:xfrm>
-            <a:off x="583200" y="1317600"/>
-            <a:ext cx="1188000" cy="125731"/>
+            <a:off x="576000" y="1173600"/>
+            <a:ext cx="972000" cy="120016"/>
           </a:xfrm>
           <a:prstGeom prst="rect">
             <a:avLst/>
@@ -3410,11 +3444,11 @@
           <a:p>
             <a:pPr algn="l">
               <a:lnSpc>
-                <a:spcPts val="956"/>
+                <a:spcPts val="913"/>
               </a:lnSpc>
             </a:pPr>
             <a:r>
-              <a:rPr sz="660" b="0">
+              <a:rPr sz="630" b="0">
                 <a:solidFill>
                   <a:srgbClr val="FFFFFF"/>
                 </a:solidFill>
@@ -3428,14 +3462,14 @@
       </p:sp>
       <p:sp>
         <p:nvSpPr>
-          <p:cNvPr id="10" name="텍스트"/>
+          <p:cNvPr id="13" name="텍스트"/>
           <p:cNvSpPr txBox="1"/>
           <p:nvPr/>
         </p:nvSpPr>
         <p:spPr>
           <a:xfrm>
-            <a:off x="252000" y="1458000"/>
-            <a:ext cx="331200" cy="99061"/>
+            <a:off x="252000" y="1314000"/>
+            <a:ext cx="324000" cy="91441"/>
           </a:xfrm>
           <a:prstGeom prst="rect">
             <a:avLst/>
@@ -3450,11 +3484,11 @@
           <a:p>
             <a:pPr algn="l">
               <a:lnSpc>
-                <a:spcPts val="754"/>
+                <a:spcPts val="696"/>
               </a:lnSpc>
             </a:pPr>
             <a:r>
-              <a:rPr sz="520" b="1" spc="120">
+              <a:rPr sz="480" b="1" spc="140">
                 <a:solidFill>
                   <a:srgbClr val="A3A9B5"/>
                 </a:solidFill>
@@ -3468,14 +3502,14 @@
       </p:sp>
       <p:sp>
         <p:nvSpPr>
-          <p:cNvPr id="11" name="텍스트"/>
+          <p:cNvPr id="14" name="텍스트"/>
           <p:cNvSpPr txBox="1"/>
           <p:nvPr/>
         </p:nvSpPr>
         <p:spPr>
           <a:xfrm>
-            <a:off x="583200" y="1447200"/>
-            <a:ext cx="1188000" cy="125731"/>
+            <a:off x="576000" y="1303200"/>
+            <a:ext cx="972000" cy="120016"/>
           </a:xfrm>
           <a:prstGeom prst="rect">
             <a:avLst/>
@@ -3490,11 +3524,11 @@
           <a:p>
             <a:pPr algn="l">
               <a:lnSpc>
-                <a:spcPts val="956"/>
+                <a:spcPts val="913"/>
               </a:lnSpc>
             </a:pPr>
             <a:r>
-              <a:rPr sz="660" b="0">
+              <a:rPr sz="630" b="0">
                 <a:solidFill>
                   <a:srgbClr val="FFFFFF"/>
                 </a:solidFill>
@@ -3508,14 +3542,14 @@
       </p:sp>
       <p:sp>
         <p:nvSpPr>
-          <p:cNvPr id="12" name="텍스트"/>
+          <p:cNvPr id="15" name="텍스트"/>
           <p:cNvSpPr txBox="1"/>
           <p:nvPr/>
         </p:nvSpPr>
         <p:spPr>
           <a:xfrm>
-            <a:off x="252000" y="1587600"/>
-            <a:ext cx="331200" cy="99061"/>
+            <a:off x="252000" y="1443600"/>
+            <a:ext cx="324000" cy="91441"/>
           </a:xfrm>
           <a:prstGeom prst="rect">
             <a:avLst/>
@@ -3530,11 +3564,11 @@
           <a:p>
             <a:pPr algn="l">
               <a:lnSpc>
-                <a:spcPts val="754"/>
+                <a:spcPts val="696"/>
               </a:lnSpc>
             </a:pPr>
             <a:r>
-              <a:rPr sz="520" b="1" spc="120">
+              <a:rPr sz="480" b="1" spc="140">
                 <a:solidFill>
                   <a:srgbClr val="A3A9B5"/>
                 </a:solidFill>
@@ -3548,14 +3582,14 @@
       </p:sp>
       <p:sp>
         <p:nvSpPr>
-          <p:cNvPr id="13" name="텍스트"/>
+          <p:cNvPr id="16" name="텍스트"/>
           <p:cNvSpPr txBox="1"/>
           <p:nvPr/>
         </p:nvSpPr>
         <p:spPr>
           <a:xfrm>
-            <a:off x="583200" y="1576800"/>
-            <a:ext cx="1188000" cy="125731"/>
+            <a:off x="576000" y="1432800"/>
+            <a:ext cx="972000" cy="120016"/>
           </a:xfrm>
           <a:prstGeom prst="rect">
             <a:avLst/>
@@ -3570,11 +3604,11 @@
           <a:p>
             <a:pPr algn="l">
               <a:lnSpc>
-                <a:spcPts val="956"/>
+                <a:spcPts val="913"/>
               </a:lnSpc>
             </a:pPr>
             <a:r>
-              <a:rPr sz="660" b="0">
+              <a:rPr sz="630" b="0">
                 <a:solidFill>
                   <a:srgbClr val="FFFFFF"/>
                 </a:solidFill>
@@ -3614,43 +3648,14 @@
       <p:grpSpPr/>
       <p:sp>
         <p:nvSpPr>
-          <p:cNvPr id="2" name="Rectangle 1"/>
-          <p:cNvSpPr/>
-          <p:nvPr/>
-        </p:nvSpPr>
-        <p:spPr>
-          <a:xfrm>
-            <a:off x="252000" y="540000"/>
-            <a:ext cx="28800" cy="720000"/>
-          </a:xfrm>
-          <a:prstGeom prst="rect">
-            <a:avLst/>
-          </a:prstGeom>
-          <a:solidFill>
-            <a:srgbClr val="FF8FB8"/>
-          </a:solidFill>
-          <a:ln>
-            <a:noFill/>
-          </a:ln>
-        </p:spPr>
-        <p:txBody>
-          <a:bodyPr rtlCol="0" anchor="ctr"/>
-          <a:lstStyle/>
-          <a:p>
-            <a:pPr algn="ctr"/>
-          </a:p>
-        </p:txBody>
-      </p:sp>
-      <p:sp>
-        <p:nvSpPr>
-          <p:cNvPr id="3" name="텍스트"/>
+          <p:cNvPr id="2" name="텍스트"/>
           <p:cNvSpPr txBox="1"/>
           <p:nvPr/>
         </p:nvSpPr>
         <p:spPr>
           <a:xfrm>
-            <a:off x="424800" y="612000"/>
-            <a:ext cx="2160000" cy="648000"/>
+            <a:off x="252000" y="223200"/>
+            <a:ext cx="1080000" cy="99061"/>
           </a:xfrm>
           <a:prstGeom prst="rect">
             <a:avLst/>
@@ -3665,32 +3670,154 @@
           <a:p>
             <a:pPr algn="l">
               <a:lnSpc>
-                <a:spcPts val="1812"/>
+                <a:spcPts val="754"/>
               </a:lnSpc>
             </a:pPr>
             <a:r>
-              <a:rPr sz="1250" b="1">
+              <a:rPr sz="520" b="1" spc="240">
+                <a:solidFill>
+                  <a:srgbClr val="6B7280"/>
+                </a:solidFill>
+                <a:latin typeface="맑은 고딕"/>
+                <a:ea typeface="맑은 고딕"/>
+              </a:rPr>
+              <a:t>담당 업무</a:t>
+            </a:r>
+          </a:p>
+        </p:txBody>
+      </p:sp>
+      <p:cxnSp>
+        <p:nvCxnSpPr>
+          <p:cNvPr id="3" name="Connector 2"/>
+          <p:cNvCxnSpPr/>
+          <p:nvPr/>
+        </p:nvCxnSpPr>
+        <p:spPr>
+          <a:xfrm>
+            <a:off x="252000" y="388800"/>
+            <a:ext cx="2736000" cy="0"/>
+          </a:xfrm>
+          <a:prstGeom prst="line">
+            <a:avLst/>
+          </a:prstGeom>
+          <a:ln w="3600">
+            <a:solidFill>
+              <a:srgbClr val="E3E5E9"/>
+            </a:solidFill>
+          </a:ln>
+        </p:spPr>
+      </p:cxnSp>
+      <p:sp>
+        <p:nvSpPr>
+          <p:cNvPr id="4" name="텍스트"/>
+          <p:cNvSpPr txBox="1"/>
+          <p:nvPr/>
+        </p:nvSpPr>
+        <p:spPr>
+          <a:xfrm>
+            <a:off x="252000" y="468000"/>
+            <a:ext cx="216000" cy="99061"/>
+          </a:xfrm>
+          <a:prstGeom prst="rect">
+            <a:avLst/>
+          </a:prstGeom>
+          <a:noFill/>
+        </p:spPr>
+        <p:txBody>
+          <a:bodyPr wrap="square" lIns="0" rIns="0" tIns="0" bIns="0" anchor="t">
+            <a:spAutoFit/>
+          </a:bodyPr>
+          <a:lstStyle/>
+          <a:p>
+            <a:pPr algn="l">
+              <a:lnSpc>
+                <a:spcPts val="754"/>
+              </a:lnSpc>
+            </a:pPr>
+            <a:r>
+              <a:rPr sz="520" b="1" spc="100">
+                <a:solidFill>
+                  <a:srgbClr val="FF8FB8"/>
+                </a:solidFill>
+                <a:latin typeface="맑은 고딕"/>
+                <a:ea typeface="맑은 고딕"/>
+              </a:rPr>
+              <a:t>01</a:t>
+            </a:r>
+          </a:p>
+        </p:txBody>
+      </p:sp>
+      <p:sp>
+        <p:nvSpPr>
+          <p:cNvPr id="5" name="텍스트"/>
+          <p:cNvSpPr txBox="1"/>
+          <p:nvPr/>
+        </p:nvSpPr>
+        <p:spPr>
+          <a:xfrm>
+            <a:off x="475200" y="457200"/>
+            <a:ext cx="1152000" cy="140971"/>
+          </a:xfrm>
+          <a:prstGeom prst="rect">
+            <a:avLst/>
+          </a:prstGeom>
+          <a:noFill/>
+        </p:spPr>
+        <p:txBody>
+          <a:bodyPr wrap="square" lIns="0" rIns="0" tIns="0" bIns="0" anchor="t">
+            <a:spAutoFit/>
+          </a:bodyPr>
+          <a:lstStyle/>
+          <a:p>
+            <a:pPr algn="l">
+              <a:lnSpc>
+                <a:spcPts val="1073"/>
+              </a:lnSpc>
+            </a:pPr>
+            <a:r>
+              <a:rPr sz="740" b="0">
                 <a:solidFill>
                   <a:srgbClr val="12151C"/>
                 </a:solidFill>
                 <a:latin typeface="맑은 고딕"/>
                 <a:ea typeface="맑은 고딕"/>
               </a:rPr>
-              <a:t>협업의 온도를 높이는 사람</a:t>
-            </a:r>
-          </a:p>
-        </p:txBody>
-      </p:sp>
-      <p:sp>
-        <p:nvSpPr>
-          <p:cNvPr id="4" name="텍스트"/>
+              <a:t>영업 관리</a:t>
+            </a:r>
+          </a:p>
+        </p:txBody>
+      </p:sp>
+      <p:cxnSp>
+        <p:nvCxnSpPr>
+          <p:cNvPr id="6" name="Connector 5"/>
+          <p:cNvCxnSpPr/>
+          <p:nvPr/>
+        </p:nvCxnSpPr>
+        <p:spPr>
+          <a:xfrm>
+            <a:off x="252000" y="691200"/>
+            <a:ext cx="1296000" cy="0"/>
+          </a:xfrm>
+          <a:prstGeom prst="line">
+            <a:avLst/>
+          </a:prstGeom>
+          <a:ln w="3600">
+            <a:solidFill>
+              <a:srgbClr val="E3E5E9"/>
+            </a:solidFill>
+          </a:ln>
+        </p:spPr>
+      </p:cxnSp>
+      <p:sp>
+        <p:nvSpPr>
+          <p:cNvPr id="7" name="텍스트"/>
           <p:cNvSpPr txBox="1"/>
           <p:nvPr/>
         </p:nvSpPr>
         <p:spPr>
           <a:xfrm>
-            <a:off x="424800" y="1512000"/>
-            <a:ext cx="1800000" cy="123826"/>
+            <a:off x="1656000" y="468000"/>
+            <a:ext cx="216000" cy="99061"/>
           </a:xfrm>
           <a:prstGeom prst="rect">
             <a:avLst/>
@@ -3705,18 +3832,361 @@
           <a:p>
             <a:pPr algn="l">
               <a:lnSpc>
-                <a:spcPts val="942"/>
+                <a:spcPts val="754"/>
               </a:lnSpc>
             </a:pPr>
             <a:r>
-              <a:rPr sz="650" b="1" spc="200">
+              <a:rPr sz="520" b="1" spc="100">
+                <a:solidFill>
+                  <a:srgbClr val="FF8FB8"/>
+                </a:solidFill>
+                <a:latin typeface="맑은 고딕"/>
+                <a:ea typeface="맑은 고딕"/>
+              </a:rPr>
+              <a:t>02</a:t>
+            </a:r>
+          </a:p>
+        </p:txBody>
+      </p:sp>
+      <p:sp>
+        <p:nvSpPr>
+          <p:cNvPr id="8" name="텍스트"/>
+          <p:cNvSpPr txBox="1"/>
+          <p:nvPr/>
+        </p:nvSpPr>
+        <p:spPr>
+          <a:xfrm>
+            <a:off x="1879200" y="457200"/>
+            <a:ext cx="1152000" cy="140971"/>
+          </a:xfrm>
+          <a:prstGeom prst="rect">
+            <a:avLst/>
+          </a:prstGeom>
+          <a:noFill/>
+        </p:spPr>
+        <p:txBody>
+          <a:bodyPr wrap="square" lIns="0" rIns="0" tIns="0" bIns="0" anchor="t">
+            <a:spAutoFit/>
+          </a:bodyPr>
+          <a:lstStyle/>
+          <a:p>
+            <a:pPr algn="l">
+              <a:lnSpc>
+                <a:spcPts val="1073"/>
+              </a:lnSpc>
+            </a:pPr>
+            <a:r>
+              <a:rPr sz="740" b="0">
+                <a:solidFill>
+                  <a:srgbClr val="12151C"/>
+                </a:solidFill>
+                <a:latin typeface="맑은 고딕"/>
+                <a:ea typeface="맑은 고딕"/>
+              </a:rPr>
+              <a:t>개발</a:t>
+            </a:r>
+          </a:p>
+        </p:txBody>
+      </p:sp>
+      <p:cxnSp>
+        <p:nvCxnSpPr>
+          <p:cNvPr id="9" name="Connector 8"/>
+          <p:cNvCxnSpPr/>
+          <p:nvPr/>
+        </p:nvCxnSpPr>
+        <p:spPr>
+          <a:xfrm>
+            <a:off x="1656000" y="691200"/>
+            <a:ext cx="1296000" cy="0"/>
+          </a:xfrm>
+          <a:prstGeom prst="line">
+            <a:avLst/>
+          </a:prstGeom>
+          <a:ln w="3600">
+            <a:solidFill>
+              <a:srgbClr val="E3E5E9"/>
+            </a:solidFill>
+          </a:ln>
+        </p:spPr>
+      </p:cxnSp>
+      <p:sp>
+        <p:nvSpPr>
+          <p:cNvPr id="10" name="텍스트"/>
+          <p:cNvSpPr txBox="1"/>
+          <p:nvPr/>
+        </p:nvSpPr>
+        <p:spPr>
+          <a:xfrm>
+            <a:off x="252000" y="813600"/>
+            <a:ext cx="216000" cy="99061"/>
+          </a:xfrm>
+          <a:prstGeom prst="rect">
+            <a:avLst/>
+          </a:prstGeom>
+          <a:noFill/>
+        </p:spPr>
+        <p:txBody>
+          <a:bodyPr wrap="square" lIns="0" rIns="0" tIns="0" bIns="0" anchor="t">
+            <a:spAutoFit/>
+          </a:bodyPr>
+          <a:lstStyle/>
+          <a:p>
+            <a:pPr algn="l">
+              <a:lnSpc>
+                <a:spcPts val="754"/>
+              </a:lnSpc>
+            </a:pPr>
+            <a:r>
+              <a:rPr sz="520" b="1" spc="100">
+                <a:solidFill>
+                  <a:srgbClr val="FF8FB8"/>
+                </a:solidFill>
+                <a:latin typeface="맑은 고딕"/>
+                <a:ea typeface="맑은 고딕"/>
+              </a:rPr>
+              <a:t>03</a:t>
+            </a:r>
+          </a:p>
+        </p:txBody>
+      </p:sp>
+      <p:sp>
+        <p:nvSpPr>
+          <p:cNvPr id="11" name="텍스트"/>
+          <p:cNvSpPr txBox="1"/>
+          <p:nvPr/>
+        </p:nvSpPr>
+        <p:spPr>
+          <a:xfrm>
+            <a:off x="475200" y="802800"/>
+            <a:ext cx="1152000" cy="140971"/>
+          </a:xfrm>
+          <a:prstGeom prst="rect">
+            <a:avLst/>
+          </a:prstGeom>
+          <a:noFill/>
+        </p:spPr>
+        <p:txBody>
+          <a:bodyPr wrap="square" lIns="0" rIns="0" tIns="0" bIns="0" anchor="t">
+            <a:spAutoFit/>
+          </a:bodyPr>
+          <a:lstStyle/>
+          <a:p>
+            <a:pPr algn="l">
+              <a:lnSpc>
+                <a:spcPts val="1073"/>
+              </a:lnSpc>
+            </a:pPr>
+            <a:r>
+              <a:rPr sz="740" b="0">
+                <a:solidFill>
+                  <a:srgbClr val="12151C"/>
+                </a:solidFill>
+                <a:latin typeface="맑은 고딕"/>
+                <a:ea typeface="맑은 고딕"/>
+              </a:rPr>
+              <a:t>재무 · 회계</a:t>
+            </a:r>
+          </a:p>
+        </p:txBody>
+      </p:sp>
+      <p:cxnSp>
+        <p:nvCxnSpPr>
+          <p:cNvPr id="12" name="Connector 11"/>
+          <p:cNvCxnSpPr/>
+          <p:nvPr/>
+        </p:nvCxnSpPr>
+        <p:spPr>
+          <a:xfrm>
+            <a:off x="252000" y="1036800"/>
+            <a:ext cx="1296000" cy="0"/>
+          </a:xfrm>
+          <a:prstGeom prst="line">
+            <a:avLst/>
+          </a:prstGeom>
+          <a:ln w="3600">
+            <a:solidFill>
+              <a:srgbClr val="E3E5E9"/>
+            </a:solidFill>
+          </a:ln>
+        </p:spPr>
+      </p:cxnSp>
+      <p:sp>
+        <p:nvSpPr>
+          <p:cNvPr id="13" name="텍스트"/>
+          <p:cNvSpPr txBox="1"/>
+          <p:nvPr/>
+        </p:nvSpPr>
+        <p:spPr>
+          <a:xfrm>
+            <a:off x="1656000" y="813600"/>
+            <a:ext cx="216000" cy="99061"/>
+          </a:xfrm>
+          <a:prstGeom prst="rect">
+            <a:avLst/>
+          </a:prstGeom>
+          <a:noFill/>
+        </p:spPr>
+        <p:txBody>
+          <a:bodyPr wrap="square" lIns="0" rIns="0" tIns="0" bIns="0" anchor="t">
+            <a:spAutoFit/>
+          </a:bodyPr>
+          <a:lstStyle/>
+          <a:p>
+            <a:pPr algn="l">
+              <a:lnSpc>
+                <a:spcPts val="754"/>
+              </a:lnSpc>
+            </a:pPr>
+            <a:r>
+              <a:rPr sz="520" b="1" spc="100">
+                <a:solidFill>
+                  <a:srgbClr val="FF8FB8"/>
+                </a:solidFill>
+                <a:latin typeface="맑은 고딕"/>
+                <a:ea typeface="맑은 고딕"/>
+              </a:rPr>
+              <a:t>04</a:t>
+            </a:r>
+          </a:p>
+        </p:txBody>
+      </p:sp>
+      <p:sp>
+        <p:nvSpPr>
+          <p:cNvPr id="14" name="텍스트"/>
+          <p:cNvSpPr txBox="1"/>
+          <p:nvPr/>
+        </p:nvSpPr>
+        <p:spPr>
+          <a:xfrm>
+            <a:off x="1879200" y="802800"/>
+            <a:ext cx="1152000" cy="140971"/>
+          </a:xfrm>
+          <a:prstGeom prst="rect">
+            <a:avLst/>
+          </a:prstGeom>
+          <a:noFill/>
+        </p:spPr>
+        <p:txBody>
+          <a:bodyPr wrap="square" lIns="0" rIns="0" tIns="0" bIns="0" anchor="t">
+            <a:spAutoFit/>
+          </a:bodyPr>
+          <a:lstStyle/>
+          <a:p>
+            <a:pPr algn="l">
+              <a:lnSpc>
+                <a:spcPts val="1073"/>
+              </a:lnSpc>
+            </a:pPr>
+            <a:r>
+              <a:rPr sz="740" b="0">
+                <a:solidFill>
+                  <a:srgbClr val="12151C"/>
+                </a:solidFill>
+                <a:latin typeface="맑은 고딕"/>
+                <a:ea typeface="맑은 고딕"/>
+              </a:rPr>
+              <a:t>제휴 문의</a:t>
+            </a:r>
+          </a:p>
+        </p:txBody>
+      </p:sp>
+      <p:cxnSp>
+        <p:nvCxnSpPr>
+          <p:cNvPr id="15" name="Connector 14"/>
+          <p:cNvCxnSpPr/>
+          <p:nvPr/>
+        </p:nvCxnSpPr>
+        <p:spPr>
+          <a:xfrm>
+            <a:off x="1656000" y="1036800"/>
+            <a:ext cx="1296000" cy="0"/>
+          </a:xfrm>
+          <a:prstGeom prst="line">
+            <a:avLst/>
+          </a:prstGeom>
+          <a:ln w="3600">
+            <a:solidFill>
+              <a:srgbClr val="E3E5E9"/>
+            </a:solidFill>
+          </a:ln>
+        </p:spPr>
+      </p:cxnSp>
+      <p:sp>
+        <p:nvSpPr>
+          <p:cNvPr id="16" name="텍스트"/>
+          <p:cNvSpPr txBox="1"/>
+          <p:nvPr/>
+        </p:nvSpPr>
+        <p:spPr>
+          <a:xfrm>
+            <a:off x="252000" y="1569600"/>
+            <a:ext cx="1368000" cy="114301"/>
+          </a:xfrm>
+          <a:prstGeom prst="rect">
+            <a:avLst/>
+          </a:prstGeom>
+          <a:noFill/>
+        </p:spPr>
+        <p:txBody>
+          <a:bodyPr wrap="square" lIns="0" rIns="0" tIns="0" bIns="0" anchor="t">
+            <a:spAutoFit/>
+          </a:bodyPr>
+          <a:lstStyle/>
+          <a:p>
+            <a:pPr algn="l">
+              <a:lnSpc>
+                <a:spcPts val="869"/>
+              </a:lnSpc>
+            </a:pPr>
+            <a:r>
+              <a:rPr sz="600" b="0">
                 <a:solidFill>
                   <a:srgbClr val="6B7280"/>
                 </a:solidFill>
                 <a:latin typeface="맑은 고딕"/>
                 <a:ea typeface="맑은 고딕"/>
               </a:rPr>
-              <a:t>회사명 · 부서명</a:t>
+              <a:t>평일 10:00 – 19:00</a:t>
+            </a:r>
+          </a:p>
+        </p:txBody>
+      </p:sp>
+      <p:sp>
+        <p:nvSpPr>
+          <p:cNvPr id="17" name="텍스트"/>
+          <p:cNvSpPr txBox="1"/>
+          <p:nvPr/>
+        </p:nvSpPr>
+        <p:spPr>
+          <a:xfrm>
+            <a:off x="1620000" y="1569600"/>
+            <a:ext cx="1368000" cy="114301"/>
+          </a:xfrm>
+          <a:prstGeom prst="rect">
+            <a:avLst/>
+          </a:prstGeom>
+          <a:noFill/>
+        </p:spPr>
+        <p:txBody>
+          <a:bodyPr wrap="square" lIns="0" rIns="0" tIns="0" bIns="0" anchor="t">
+            <a:spAutoFit/>
+          </a:bodyPr>
+          <a:lstStyle/>
+          <a:p>
+            <a:pPr algn="r">
+              <a:lnSpc>
+                <a:spcPts val="869"/>
+              </a:lnSpc>
+            </a:pPr>
+            <a:r>
+              <a:rPr sz="600" b="0">
+                <a:solidFill>
+                  <a:srgbClr val="6B7280"/>
+                </a:solidFill>
+                <a:latin typeface="맑은 고딕"/>
+                <a:ea typeface="맑은 고딕"/>
+              </a:rPr>
+              <a:t>www.example.com</a:t>
             </a:r>
           </a:p>
         </p:txBody>
